--- a/Planning docs/Slides/lesson-20-4-teacher-slides.pptx
+++ b/Planning docs/Slides/lesson-20-4-teacher-slides.pptx
@@ -5086,7 +5086,7 @@
                 <a:ea typeface="Calibri" pitchFamily="34" charset="-122"/>
                 <a:cs typeface="Calibri" pitchFamily="34" charset="-120"/>
               </a:rPr>
-              <a:t>•  Good readers look back at a section and find the single most important turning point. Which moment in Chapters 11–15 changed the story the most?</a:t>
+              <a:t>•  Three things happened in Chapters 11–15: the prince gave Jemmy away, Jemmy escaped and met Betsy, and the prince picked up mud flat scraps. Which tells you the most about the prince?</a:t>
             </a:r>
             <a:endParaRPr lang="en-US" sz="1500" dirty="0"/>
           </a:p>
@@ -5103,24 +5103,7 @@
                 <a:ea typeface="Calibri" pitchFamily="34" charset="-122"/>
                 <a:cs typeface="Calibri" pitchFamily="34" charset="-120"/>
               </a:rPr>
-              <a:t>•  Rewrite the turtle poem as a real haiku: three lines, 5–7–5, no rhyme. You will have to leave things out. What did you cut?</a:t>
-            </a:r>
-            <a:endParaRPr lang="en-US" sz="1500" dirty="0"/>
-          </a:p>
-          <a:p>
-            <a:pPr indent="0" marL="0">
-              <a:buNone/>
-            </a:pPr>
-            <a:r>
-              <a:rPr lang="en-US" sz="1500" dirty="0">
-                <a:solidFill>
-                  <a:srgbClr val="1E293B"/>
-                </a:solidFill>
-                <a:latin typeface="Calibri" pitchFamily="34" charset="0"/>
-                <a:ea typeface="Calibri" pitchFamily="34" charset="-122"/>
-                <a:cs typeface="Calibri" pitchFamily="34" charset="-120"/>
-              </a:rPr>
-              <a:t>•  Look at the letters around the dot in each word. Count: vowel, consonant, consonant, vowel. That's the VCCV pattern .</a:t>
+              <a:t>•  Does Jemmy trust the prince more, less, or the same as in Chapter 1? Use one event as evidence.</a:t>
             </a:r>
             <a:endParaRPr lang="en-US" sz="1500" dirty="0"/>
           </a:p>
